--- a/website/public/generated/LMD-Bridgs/06_samco_pco_22_pro_prod_22_productivity.pptx
+++ b/website/public/generated/LMD-Bridgs/06_samco_pco_22_pro_prod_22_productivity.pptx
@@ -3162,7 +3162,7 @@
               </a:defRPr>
             </a:pPr>
             <a:r>
-              <a:t>LMD Bridge &amp; Road Interchange | 1 data-driven control section | 2026-08-14T03:05:27+00:00</a:t>
+              <a:t>LMD Bridge &amp; Road Interchange | 1 data-driven control section | 2026-08-15T05:30:57+00:00</a:t>
             </a:r>
           </a:p>
         </p:txBody>
@@ -3340,7 +3340,7 @@
               </a:defRPr>
             </a:pPr>
             <a:r>
-              <a:t>activities: 01-data/import_templates/activities.csv (17 rows)</a:t>
+              <a:t>activities: 01-data/import_templates/project_input_bundle.csv (17 rows)</a:t>
             </a:r>
           </a:p>
           <a:p>
@@ -3352,7 +3352,7 @@
               </a:defRPr>
             </a:pPr>
             <a:r>
-              <a:t>progress: 01-data/import_templates/progress_updates.csv (17 rows)</a:t>
+              <a:t>progress: 01-data/import_templates/project_input_bundle.csv (17 rows)</a:t>
             </a:r>
           </a:p>
         </p:txBody>
